--- a/docs/presentation.pptx
+++ b/docs/presentation.pptx
@@ -4748,14 +4748,49 @@
       </p:sp>
       <p:sp>
         <p:nvSpPr>
-          <p:cNvPr id="25" name="Rectangle 24"/>
+          <p:cNvPr id="25" name="TextBox 24"/>
+          <p:cNvSpPr txBox="1"/>
+          <p:nvPr/>
+        </p:nvSpPr>
+        <p:spPr>
+          <a:xfrm>
+            <a:off x="4754880" y="1554480"/>
+            <a:ext cx="1371600" cy="292608"/>
+          </a:xfrm>
+          <a:prstGeom prst="rect">
+            <a:avLst/>
+          </a:prstGeom>
+          <a:noFill/>
+        </p:spPr>
+        <p:txBody>
+          <a:bodyPr wrap="square" lIns="18288" rIns="18288" tIns="9144" bIns="9144" anchor="ctr">
+            <a:spAutoFit/>
+          </a:bodyPr>
+          <a:lstStyle/>
+          <a:p>
+            <a:pPr algn="r"/>
+            <a:r>
+              <a:rPr sz="1000" b="1" i="0">
+                <a:solidFill>
+                  <a:srgbClr val="121E3F"/>
+                </a:solidFill>
+                <a:latin typeface="Calibri"/>
+              </a:rPr>
+              <a:t>StandardUCT</a:t>
+            </a:r>
+          </a:p>
+        </p:txBody>
+      </p:sp>
+      <p:sp>
+        <p:nvSpPr>
+          <p:cNvPr id="26" name="Rectangle 25"/>
           <p:cNvSpPr/>
           <p:nvPr/>
         </p:nvSpPr>
         <p:spPr>
           <a:xfrm>
-            <a:off x="4846320" y="1554480"/>
-            <a:ext cx="666800" cy="365760"/>
+            <a:off x="6172200" y="1554480"/>
+            <a:ext cx="466760" cy="292608"/>
           </a:xfrm>
           <a:prstGeom prst="rect">
             <a:avLst/>
@@ -4792,14 +4827,14 @@
       </p:sp>
       <p:sp>
         <p:nvSpPr>
-          <p:cNvPr id="26" name="TextBox 25"/>
-          <p:cNvSpPr txBox="1"/>
-          <p:nvPr/>
-        </p:nvSpPr>
-        <p:spPr>
-          <a:xfrm>
-            <a:off x="4846320" y="1536192"/>
-            <a:ext cx="666800" cy="402336"/>
+          <p:cNvPr id="27" name="TextBox 26"/>
+          <p:cNvSpPr txBox="1"/>
+          <p:nvPr/>
+        </p:nvSpPr>
+        <p:spPr>
+          <a:xfrm>
+            <a:off x="6684680" y="1554480"/>
+            <a:ext cx="777240" cy="292608"/>
           </a:xfrm>
           <a:prstGeom prst="rect">
             <a:avLst/>
@@ -4814,27 +4849,27 @@
           <a:p>
             <a:pPr algn="l"/>
             <a:r>
-              <a:rPr sz="900" b="1" i="0">
-                <a:solidFill>
-                  <a:srgbClr val="FFFFFF"/>
-                </a:solidFill>
-                <a:latin typeface="Calibri"/>
-              </a:rPr>
-              <a:t>StandardUCT</a:t>
-            </a:r>
-          </a:p>
-        </p:txBody>
-      </p:sp>
-      <p:sp>
-        <p:nvSpPr>
-          <p:cNvPr id="27" name="TextBox 26"/>
-          <p:cNvSpPr txBox="1"/>
-          <p:nvPr/>
-        </p:nvSpPr>
-        <p:spPr>
-          <a:xfrm>
-            <a:off x="5558840" y="1554480"/>
-            <a:ext cx="914400" cy="365760"/>
+              <a:rPr sz="900" b="0" i="0">
+                <a:solidFill>
+                  <a:srgbClr val="121E3F"/>
+                </a:solidFill>
+                <a:latin typeface="Calibri"/>
+              </a:rPr>
+              <a:t>9 iter/s</a:t>
+            </a:r>
+          </a:p>
+        </p:txBody>
+      </p:sp>
+      <p:sp>
+        <p:nvSpPr>
+          <p:cNvPr id="28" name="TextBox 27"/>
+          <p:cNvSpPr txBox="1"/>
+          <p:nvPr/>
+        </p:nvSpPr>
+        <p:spPr>
+          <a:xfrm>
+            <a:off x="4754880" y="1956816"/>
+            <a:ext cx="1371600" cy="292608"/>
           </a:xfrm>
           <a:prstGeom prst="rect">
             <a:avLst/>
@@ -4847,29 +4882,29 @@
           </a:bodyPr>
           <a:lstStyle/>
           <a:p>
-            <a:pPr algn="l"/>
-            <a:r>
-              <a:rPr sz="1000" b="0" i="0">
+            <a:pPr algn="r"/>
+            <a:r>
+              <a:rPr sz="1000" b="1" i="0">
                 <a:solidFill>
                   <a:srgbClr val="121E3F"/>
                 </a:solidFill>
                 <a:latin typeface="Calibri"/>
               </a:rPr>
-              <a:t>9 iter/s</a:t>
-            </a:r>
-          </a:p>
-        </p:txBody>
-      </p:sp>
-      <p:sp>
-        <p:nvSpPr>
-          <p:cNvPr id="28" name="Rectangle 27"/>
+              <a:t>NumbaMCTS</a:t>
+            </a:r>
+          </a:p>
+        </p:txBody>
+      </p:sp>
+      <p:sp>
+        <p:nvSpPr>
+          <p:cNvPr id="29" name="Rectangle 28"/>
           <p:cNvSpPr/>
           <p:nvPr/>
         </p:nvSpPr>
         <p:spPr>
           <a:xfrm>
-            <a:off x="4846320" y="2011680"/>
-            <a:ext cx="1138607" cy="365760"/>
+            <a:off x="6172200" y="1956816"/>
+            <a:ext cx="797025" cy="292608"/>
           </a:xfrm>
           <a:prstGeom prst="rect">
             <a:avLst/>
@@ -4906,14 +4941,14 @@
       </p:sp>
       <p:sp>
         <p:nvSpPr>
-          <p:cNvPr id="29" name="TextBox 28"/>
-          <p:cNvSpPr txBox="1"/>
-          <p:nvPr/>
-        </p:nvSpPr>
-        <p:spPr>
-          <a:xfrm>
-            <a:off x="4846320" y="1993392"/>
-            <a:ext cx="1138607" cy="402336"/>
+          <p:cNvPr id="30" name="TextBox 29"/>
+          <p:cNvSpPr txBox="1"/>
+          <p:nvPr/>
+        </p:nvSpPr>
+        <p:spPr>
+          <a:xfrm>
+            <a:off x="7014945" y="1956816"/>
+            <a:ext cx="777240" cy="292608"/>
           </a:xfrm>
           <a:prstGeom prst="rect">
             <a:avLst/>
@@ -4928,27 +4963,27 @@
           <a:p>
             <a:pPr algn="l"/>
             <a:r>
-              <a:rPr sz="900" b="1" i="0">
-                <a:solidFill>
-                  <a:srgbClr val="FFFFFF"/>
-                </a:solidFill>
-                <a:latin typeface="Calibri"/>
-              </a:rPr>
-              <a:t>NumbaMCTS</a:t>
-            </a:r>
-          </a:p>
-        </p:txBody>
-      </p:sp>
-      <p:sp>
-        <p:nvSpPr>
-          <p:cNvPr id="30" name="TextBox 29"/>
-          <p:cNvSpPr txBox="1"/>
-          <p:nvPr/>
-        </p:nvSpPr>
-        <p:spPr>
-          <a:xfrm>
-            <a:off x="6030647" y="2011680"/>
-            <a:ext cx="914400" cy="365760"/>
+              <a:rPr sz="900" b="0" i="0">
+                <a:solidFill>
+                  <a:srgbClr val="121E3F"/>
+                </a:solidFill>
+                <a:latin typeface="Calibri"/>
+              </a:rPr>
+              <a:t>50 iter/s</a:t>
+            </a:r>
+          </a:p>
+        </p:txBody>
+      </p:sp>
+      <p:sp>
+        <p:nvSpPr>
+          <p:cNvPr id="31" name="TextBox 30"/>
+          <p:cNvSpPr txBox="1"/>
+          <p:nvPr/>
+        </p:nvSpPr>
+        <p:spPr>
+          <a:xfrm>
+            <a:off x="4754880" y="2359152"/>
+            <a:ext cx="1371600" cy="292608"/>
           </a:xfrm>
           <a:prstGeom prst="rect">
             <a:avLst/>
@@ -4961,29 +4996,29 @@
           </a:bodyPr>
           <a:lstStyle/>
           <a:p>
-            <a:pPr algn="l"/>
-            <a:r>
-              <a:rPr sz="1000" b="0" i="0">
+            <a:pPr algn="r"/>
+            <a:r>
+              <a:rPr sz="1000" b="1" i="0">
                 <a:solidFill>
                   <a:srgbClr val="121E3F"/>
                 </a:solidFill>
                 <a:latin typeface="Calibri"/>
               </a:rPr>
-              <a:t>50 iter/s</a:t>
-            </a:r>
-          </a:p>
-        </p:txBody>
-      </p:sp>
-      <p:sp>
-        <p:nvSpPr>
-          <p:cNvPr id="31" name="Rectangle 30"/>
+              <a:t>FlatNumbaMCTS</a:t>
+            </a:r>
+          </a:p>
+        </p:txBody>
+      </p:sp>
+      <p:sp>
+        <p:nvSpPr>
+          <p:cNvPr id="32" name="Rectangle 31"/>
           <p:cNvSpPr/>
           <p:nvPr/>
         </p:nvSpPr>
         <p:spPr>
           <a:xfrm>
-            <a:off x="4846320" y="2468880"/>
-            <a:ext cx="1503815" cy="365760"/>
+            <a:off x="6172200" y="2359152"/>
+            <a:ext cx="1052671" cy="292608"/>
           </a:xfrm>
           <a:prstGeom prst="rect">
             <a:avLst/>
@@ -5020,14 +5055,14 @@
       </p:sp>
       <p:sp>
         <p:nvSpPr>
-          <p:cNvPr id="32" name="TextBox 31"/>
-          <p:cNvSpPr txBox="1"/>
-          <p:nvPr/>
-        </p:nvSpPr>
-        <p:spPr>
-          <a:xfrm>
-            <a:off x="4846320" y="2450592"/>
-            <a:ext cx="1503815" cy="402336"/>
+          <p:cNvPr id="33" name="TextBox 32"/>
+          <p:cNvSpPr txBox="1"/>
+          <p:nvPr/>
+        </p:nvSpPr>
+        <p:spPr>
+          <a:xfrm>
+            <a:off x="7270591" y="2359152"/>
+            <a:ext cx="777240" cy="292608"/>
           </a:xfrm>
           <a:prstGeom prst="rect">
             <a:avLst/>
@@ -5042,27 +5077,27 @@
           <a:p>
             <a:pPr algn="l"/>
             <a:r>
-              <a:rPr sz="900" b="1" i="0">
-                <a:solidFill>
-                  <a:srgbClr val="FFFFFF"/>
-                </a:solidFill>
-                <a:latin typeface="Calibri"/>
-              </a:rPr>
-              <a:t>FlatNumbaMCTS</a:t>
-            </a:r>
-          </a:p>
-        </p:txBody>
-      </p:sp>
-      <p:sp>
-        <p:nvSpPr>
-          <p:cNvPr id="33" name="TextBox 32"/>
-          <p:cNvSpPr txBox="1"/>
-          <p:nvPr/>
-        </p:nvSpPr>
-        <p:spPr>
-          <a:xfrm>
-            <a:off x="6395855" y="2468880"/>
-            <a:ext cx="914400" cy="365760"/>
+              <a:rPr sz="900" b="0" i="0">
+                <a:solidFill>
+                  <a:srgbClr val="121E3F"/>
+                </a:solidFill>
+                <a:latin typeface="Calibri"/>
+              </a:rPr>
+              <a:t>179 iter/s</a:t>
+            </a:r>
+          </a:p>
+        </p:txBody>
+      </p:sp>
+      <p:sp>
+        <p:nvSpPr>
+          <p:cNvPr id="34" name="TextBox 33"/>
+          <p:cNvSpPr txBox="1"/>
+          <p:nvPr/>
+        </p:nvSpPr>
+        <p:spPr>
+          <a:xfrm>
+            <a:off x="4754880" y="2761488"/>
+            <a:ext cx="1371600" cy="292608"/>
           </a:xfrm>
           <a:prstGeom prst="rect">
             <a:avLst/>
@@ -5075,29 +5110,29 @@
           </a:bodyPr>
           <a:lstStyle/>
           <a:p>
-            <a:pPr algn="l"/>
-            <a:r>
-              <a:rPr sz="1000" b="0" i="0">
+            <a:pPr algn="r"/>
+            <a:r>
+              <a:rPr sz="1000" b="1" i="0">
                 <a:solidFill>
                   <a:srgbClr val="121E3F"/>
                 </a:solidFill>
                 <a:latin typeface="Calibri"/>
               </a:rPr>
-              <a:t>179 iter/s</a:t>
-            </a:r>
-          </a:p>
-        </p:txBody>
-      </p:sp>
-      <p:sp>
-        <p:nvSpPr>
-          <p:cNvPr id="34" name="Rectangle 33"/>
+              <a:t>FlatNumbaSolverMCTS</a:t>
+            </a:r>
+          </a:p>
+        </p:txBody>
+      </p:sp>
+      <p:sp>
+        <p:nvSpPr>
+          <p:cNvPr id="35" name="Rectangle 34"/>
           <p:cNvSpPr/>
           <p:nvPr/>
         </p:nvSpPr>
         <p:spPr>
           <a:xfrm>
-            <a:off x="4846320" y="2926080"/>
-            <a:ext cx="1485555" cy="365760"/>
+            <a:off x="6172200" y="2761488"/>
+            <a:ext cx="1039888" cy="292608"/>
           </a:xfrm>
           <a:prstGeom prst="rect">
             <a:avLst/>
@@ -5134,14 +5169,14 @@
       </p:sp>
       <p:sp>
         <p:nvSpPr>
-          <p:cNvPr id="35" name="TextBox 34"/>
-          <p:cNvSpPr txBox="1"/>
-          <p:nvPr/>
-        </p:nvSpPr>
-        <p:spPr>
-          <a:xfrm>
-            <a:off x="4846320" y="2907792"/>
-            <a:ext cx="1485555" cy="402336"/>
+          <p:cNvPr id="36" name="TextBox 35"/>
+          <p:cNvSpPr txBox="1"/>
+          <p:nvPr/>
+        </p:nvSpPr>
+        <p:spPr>
+          <a:xfrm>
+            <a:off x="7257808" y="2761488"/>
+            <a:ext cx="777240" cy="292608"/>
           </a:xfrm>
           <a:prstGeom prst="rect">
             <a:avLst/>
@@ -5156,27 +5191,27 @@
           <a:p>
             <a:pPr algn="l"/>
             <a:r>
-              <a:rPr sz="900" b="1" i="0">
-                <a:solidFill>
-                  <a:srgbClr val="FFFFFF"/>
-                </a:solidFill>
-                <a:latin typeface="Calibri"/>
-              </a:rPr>
-              <a:t>FlatNumbaSolverMCTS</a:t>
-            </a:r>
-          </a:p>
-        </p:txBody>
-      </p:sp>
-      <p:sp>
-        <p:nvSpPr>
-          <p:cNvPr id="36" name="TextBox 35"/>
-          <p:cNvSpPr txBox="1"/>
-          <p:nvPr/>
-        </p:nvSpPr>
-        <p:spPr>
-          <a:xfrm>
-            <a:off x="6377595" y="2926080"/>
-            <a:ext cx="914400" cy="365760"/>
+              <a:rPr sz="900" b="0" i="0">
+                <a:solidFill>
+                  <a:srgbClr val="121E3F"/>
+                </a:solidFill>
+                <a:latin typeface="Calibri"/>
+              </a:rPr>
+              <a:t>168 iter/s</a:t>
+            </a:r>
+          </a:p>
+        </p:txBody>
+      </p:sp>
+      <p:sp>
+        <p:nvSpPr>
+          <p:cNvPr id="37" name="TextBox 36"/>
+          <p:cNvSpPr txBox="1"/>
+          <p:nvPr/>
+        </p:nvSpPr>
+        <p:spPr>
+          <a:xfrm>
+            <a:off x="4754880" y="3163824"/>
+            <a:ext cx="1371600" cy="292608"/>
           </a:xfrm>
           <a:prstGeom prst="rect">
             <a:avLst/>
@@ -5189,29 +5224,29 @@
           </a:bodyPr>
           <a:lstStyle/>
           <a:p>
-            <a:pPr algn="l"/>
-            <a:r>
-              <a:rPr sz="1000" b="0" i="0">
+            <a:pPr algn="r"/>
+            <a:r>
+              <a:rPr sz="1000" b="1" i="0">
                 <a:solidFill>
                   <a:srgbClr val="121E3F"/>
                 </a:solidFill>
                 <a:latin typeface="Calibri"/>
               </a:rPr>
-              <a:t>168 iter/s</a:t>
-            </a:r>
-          </a:p>
-        </p:txBody>
-      </p:sp>
-      <p:sp>
-        <p:nvSpPr>
-          <p:cNvPr id="37" name="Rectangle 36"/>
+              <a:t>ReuseFlat (peak)</a:t>
+            </a:r>
+          </a:p>
+        </p:txBody>
+      </p:sp>
+      <p:sp>
+        <p:nvSpPr>
+          <p:cNvPr id="38" name="Rectangle 37"/>
           <p:cNvSpPr/>
           <p:nvPr/>
         </p:nvSpPr>
         <p:spPr>
           <a:xfrm>
-            <a:off x="4846320" y="3383280"/>
-            <a:ext cx="2743200" cy="365760"/>
+            <a:off x="6172200" y="3163824"/>
+            <a:ext cx="1920240" cy="292608"/>
           </a:xfrm>
           <a:prstGeom prst="rect">
             <a:avLst/>
@@ -5248,14 +5283,14 @@
       </p:sp>
       <p:sp>
         <p:nvSpPr>
-          <p:cNvPr id="38" name="TextBox 37"/>
-          <p:cNvSpPr txBox="1"/>
-          <p:nvPr/>
-        </p:nvSpPr>
-        <p:spPr>
-          <a:xfrm>
-            <a:off x="4846320" y="3364992"/>
-            <a:ext cx="2743200" cy="402336"/>
+          <p:cNvPr id="39" name="TextBox 38"/>
+          <p:cNvSpPr txBox="1"/>
+          <p:nvPr/>
+        </p:nvSpPr>
+        <p:spPr>
+          <a:xfrm>
+            <a:off x="8138160" y="3163824"/>
+            <a:ext cx="777240" cy="292608"/>
           </a:xfrm>
           <a:prstGeom prst="rect">
             <a:avLst/>
@@ -5270,42 +5305,7 @@
           <a:p>
             <a:pPr algn="l"/>
             <a:r>
-              <a:rPr sz="900" b="1" i="0">
-                <a:solidFill>
-                  <a:srgbClr val="FFFFFF"/>
-                </a:solidFill>
-                <a:latin typeface="Calibri"/>
-              </a:rPr>
-              <a:t>ReuseFlat (peak)</a:t>
-            </a:r>
-          </a:p>
-        </p:txBody>
-      </p:sp>
-      <p:sp>
-        <p:nvSpPr>
-          <p:cNvPr id="39" name="TextBox 38"/>
-          <p:cNvSpPr txBox="1"/>
-          <p:nvPr/>
-        </p:nvSpPr>
-        <p:spPr>
-          <a:xfrm>
-            <a:off x="7635240" y="3383280"/>
-            <a:ext cx="914400" cy="365760"/>
-          </a:xfrm>
-          <a:prstGeom prst="rect">
-            <a:avLst/>
-          </a:prstGeom>
-          <a:noFill/>
-        </p:spPr>
-        <p:txBody>
-          <a:bodyPr wrap="square" lIns="18288" rIns="18288" tIns="9144" bIns="9144" anchor="ctr">
-            <a:spAutoFit/>
-          </a:bodyPr>
-          <a:lstStyle/>
-          <a:p>
-            <a:pPr algn="l"/>
-            <a:r>
-              <a:rPr sz="1000" b="0" i="0">
+              <a:rPr sz="900" b="0" i="0">
                 <a:solidFill>
                   <a:srgbClr val="121E3F"/>
                 </a:solidFill>
@@ -5324,8 +5324,8 @@
         </p:nvSpPr>
         <p:spPr>
           <a:xfrm>
-            <a:off x="4754880" y="4160520"/>
-            <a:ext cx="3931920" cy="274320"/>
+            <a:off x="4754880" y="4114800"/>
+            <a:ext cx="3931920" cy="228600"/>
           </a:xfrm>
           <a:prstGeom prst="rect">
             <a:avLst/>
@@ -7770,41 +7770,50 @@
           </a:p>
         </p:txBody>
       </p:sp>
-      <p:cxnSp>
-        <p:nvCxnSpPr>
-          <p:cNvPr id="9" name="Connector 8"/>
-          <p:cNvCxnSpPr/>
-          <p:nvPr/>
-        </p:nvCxnSpPr>
-        <p:spPr>
-          <a:xfrm>
-            <a:off x="2395728" y="1577340"/>
-            <a:ext cx="146304" cy="0"/>
-          </a:xfrm>
-          <a:prstGeom prst="bentConnector3">
-            <a:avLst/>
-          </a:prstGeom>
-          <a:ln w="38100">
-            <a:solidFill>
-              <a:srgbClr val="121E3F"/>
-            </a:solidFill>
+      <p:sp>
+        <p:nvSpPr>
+          <p:cNvPr id="9" name="Right Arrow 8"/>
+          <p:cNvSpPr/>
+          <p:nvPr/>
+        </p:nvSpPr>
+        <p:spPr>
+          <a:xfrm>
+            <a:off x="2386584" y="1383030"/>
+            <a:ext cx="164592" cy="388620"/>
+          </a:xfrm>
+          <a:prstGeom prst="rightArrow">
+            <a:avLst/>
+          </a:prstGeom>
+          <a:solidFill>
+            <a:srgbClr val="121E3F"/>
+          </a:solidFill>
+          <a:ln>
+            <a:noFill/>
           </a:ln>
+          <a:effectLst/>
         </p:spPr>
         <p:style>
-          <a:lnRef idx="2">
+          <a:lnRef idx="1">
             <a:schemeClr val="accent1"/>
           </a:lnRef>
-          <a:fillRef idx="0">
+          <a:fillRef idx="3">
             <a:schemeClr val="accent1"/>
           </a:fillRef>
-          <a:effectRef idx="1">
+          <a:effectRef idx="2">
             <a:schemeClr val="accent1"/>
           </a:effectRef>
           <a:fontRef idx="minor">
-            <a:schemeClr val="tx1"/>
+            <a:schemeClr val="lt1"/>
           </a:fontRef>
         </p:style>
-      </p:cxnSp>
+        <p:txBody>
+          <a:bodyPr rtlCol="0" anchor="ctr"/>
+          <a:lstStyle/>
+          <a:p>
+            <a:pPr algn="ctr"/>
+          </a:p>
+        </p:txBody>
+      </p:sp>
       <p:sp>
         <p:nvSpPr>
           <p:cNvPr id="10" name="Rectangle 9"/>
@@ -7885,41 +7894,50 @@
           </a:p>
         </p:txBody>
       </p:sp>
-      <p:cxnSp>
-        <p:nvCxnSpPr>
-          <p:cNvPr id="12" name="Connector 11"/>
-          <p:cNvCxnSpPr/>
-          <p:nvPr/>
-        </p:nvCxnSpPr>
-        <p:spPr>
-          <a:xfrm>
-            <a:off x="4498848" y="1577340"/>
-            <a:ext cx="146304" cy="0"/>
-          </a:xfrm>
-          <a:prstGeom prst="bentConnector3">
-            <a:avLst/>
-          </a:prstGeom>
-          <a:ln w="38100">
-            <a:solidFill>
-              <a:srgbClr val="121E3F"/>
-            </a:solidFill>
+      <p:sp>
+        <p:nvSpPr>
+          <p:cNvPr id="12" name="Right Arrow 11"/>
+          <p:cNvSpPr/>
+          <p:nvPr/>
+        </p:nvSpPr>
+        <p:spPr>
+          <a:xfrm>
+            <a:off x="4489704" y="1383030"/>
+            <a:ext cx="164592" cy="388620"/>
+          </a:xfrm>
+          <a:prstGeom prst="rightArrow">
+            <a:avLst/>
+          </a:prstGeom>
+          <a:solidFill>
+            <a:srgbClr val="121E3F"/>
+          </a:solidFill>
+          <a:ln>
+            <a:noFill/>
           </a:ln>
+          <a:effectLst/>
         </p:spPr>
         <p:style>
-          <a:lnRef idx="2">
+          <a:lnRef idx="1">
             <a:schemeClr val="accent1"/>
           </a:lnRef>
-          <a:fillRef idx="0">
+          <a:fillRef idx="3">
             <a:schemeClr val="accent1"/>
           </a:fillRef>
-          <a:effectRef idx="1">
+          <a:effectRef idx="2">
             <a:schemeClr val="accent1"/>
           </a:effectRef>
           <a:fontRef idx="minor">
-            <a:schemeClr val="tx1"/>
+            <a:schemeClr val="lt1"/>
           </a:fontRef>
         </p:style>
-      </p:cxnSp>
+        <p:txBody>
+          <a:bodyPr rtlCol="0" anchor="ctr"/>
+          <a:lstStyle/>
+          <a:p>
+            <a:pPr algn="ctr"/>
+          </a:p>
+        </p:txBody>
+      </p:sp>
       <p:sp>
         <p:nvSpPr>
           <p:cNvPr id="13" name="Rectangle 12"/>
@@ -8000,41 +8018,50 @@
           </a:p>
         </p:txBody>
       </p:sp>
-      <p:cxnSp>
-        <p:nvCxnSpPr>
-          <p:cNvPr id="15" name="Connector 14"/>
-          <p:cNvCxnSpPr/>
-          <p:nvPr/>
-        </p:nvCxnSpPr>
-        <p:spPr>
-          <a:xfrm>
-            <a:off x="6601968" y="1577340"/>
-            <a:ext cx="146304" cy="0"/>
-          </a:xfrm>
-          <a:prstGeom prst="bentConnector3">
-            <a:avLst/>
-          </a:prstGeom>
-          <a:ln w="38100">
-            <a:solidFill>
-              <a:srgbClr val="121E3F"/>
-            </a:solidFill>
+      <p:sp>
+        <p:nvSpPr>
+          <p:cNvPr id="15" name="Right Arrow 14"/>
+          <p:cNvSpPr/>
+          <p:nvPr/>
+        </p:nvSpPr>
+        <p:spPr>
+          <a:xfrm>
+            <a:off x="6592824" y="1383030"/>
+            <a:ext cx="164592" cy="388620"/>
+          </a:xfrm>
+          <a:prstGeom prst="rightArrow">
+            <a:avLst/>
+          </a:prstGeom>
+          <a:solidFill>
+            <a:srgbClr val="121E3F"/>
+          </a:solidFill>
+          <a:ln>
+            <a:noFill/>
           </a:ln>
+          <a:effectLst/>
         </p:spPr>
         <p:style>
-          <a:lnRef idx="2">
+          <a:lnRef idx="1">
             <a:schemeClr val="accent1"/>
           </a:lnRef>
-          <a:fillRef idx="0">
+          <a:fillRef idx="3">
             <a:schemeClr val="accent1"/>
           </a:fillRef>
-          <a:effectRef idx="1">
+          <a:effectRef idx="2">
             <a:schemeClr val="accent1"/>
           </a:effectRef>
           <a:fontRef idx="minor">
-            <a:schemeClr val="tx1"/>
+            <a:schemeClr val="lt1"/>
           </a:fontRef>
         </p:style>
-      </p:cxnSp>
+        <p:txBody>
+          <a:bodyPr rtlCol="0" anchor="ctr"/>
+          <a:lstStyle/>
+          <a:p>
+            <a:pPr algn="ctr"/>
+          </a:p>
+        </p:txBody>
+      </p:sp>
       <p:sp>
         <p:nvSpPr>
           <p:cNvPr id="16" name="Rectangle 15"/>
@@ -12266,7 +12293,7 @@
         <p:spPr>
           <a:xfrm>
             <a:off x="457200" y="2697480"/>
-            <a:ext cx="5120640" cy="3058521"/>
+            <a:ext cx="3521088" cy="2103120"/>
           </a:xfrm>
           <a:prstGeom prst="rect">
             <a:avLst/>
@@ -24950,7 +24977,7 @@
         <p:spPr>
           <a:xfrm>
             <a:off x="457200" y="1600200"/>
-            <a:ext cx="4114800" cy="1645920"/>
+            <a:ext cx="4114800" cy="1188720"/>
           </a:xfrm>
           <a:prstGeom prst="rect">
             <a:avLst/>
@@ -24984,8 +25011,7 @@
                 </a:solidFill>
                 <a:latin typeface="Calibri"/>
               </a:rPr>
-              <a:t>Após todos os filhos visitados pelo menos 1×,
-limita selecção aos top-K por UCT.</a:t>
+              <a:t>Após cada filho visitado pelo menos 1×, restringe a selecção aos K filhos com maior UCT.</a:t>
             </a:r>
           </a:p>
           <a:p>
@@ -25035,7 +25061,7 @@
                 </a:solidFill>
                 <a:latin typeface="Calibri"/>
               </a:rPr>
-              <a:t>Hiperparâmetro k controla largura.</a:t>
+              <a:t>Hiperparâmetro k controla a largura da pesquisa.</a:t>
             </a:r>
           </a:p>
         </p:txBody>
@@ -25048,42 +25074,42 @@
         </p:nvSpPr>
         <p:spPr>
           <a:xfrm>
+            <a:off x="457200" y="2880360"/>
+            <a:ext cx="4114800" cy="365760"/>
+          </a:xfrm>
+          <a:prstGeom prst="rect">
+            <a:avLst/>
+          </a:prstGeom>
+          <a:noFill/>
+        </p:spPr>
+        <p:txBody>
+          <a:bodyPr wrap="square" lIns="18288" rIns="18288" tIns="9144" bIns="9144" anchor="t">
+            <a:spAutoFit/>
+          </a:bodyPr>
+          <a:lstStyle/>
+          <a:p>
+            <a:pPr algn="l"/>
+            <a:r>
+              <a:rPr sz="1400" b="1" i="0">
+                <a:solidFill>
+                  <a:srgbClr val="065A82"/>
+                </a:solidFill>
+                <a:latin typeface="Calibri"/>
+              </a:rPr>
+              <a:t>Metodologia</a:t>
+            </a:r>
+          </a:p>
+        </p:txBody>
+      </p:sp>
+      <p:sp>
+        <p:nvSpPr>
+          <p:cNvPr id="10" name="TextBox 9"/>
+          <p:cNvSpPr txBox="1"/>
+          <p:nvPr/>
+        </p:nvSpPr>
+        <p:spPr>
+          <a:xfrm>
             <a:off x="457200" y="3291840"/>
-            <a:ext cx="4114800" cy="365760"/>
-          </a:xfrm>
-          <a:prstGeom prst="rect">
-            <a:avLst/>
-          </a:prstGeom>
-          <a:noFill/>
-        </p:spPr>
-        <p:txBody>
-          <a:bodyPr wrap="square" lIns="18288" rIns="18288" tIns="9144" bIns="9144" anchor="t">
-            <a:spAutoFit/>
-          </a:bodyPr>
-          <a:lstStyle/>
-          <a:p>
-            <a:pPr algn="l"/>
-            <a:r>
-              <a:rPr sz="1400" b="1" i="0">
-                <a:solidFill>
-                  <a:srgbClr val="065A82"/>
-                </a:solidFill>
-                <a:latin typeface="Calibri"/>
-              </a:rPr>
-              <a:t>Metodologia</a:t>
-            </a:r>
-          </a:p>
-        </p:txBody>
-      </p:sp>
-      <p:sp>
-        <p:nvSpPr>
-          <p:cNvPr id="10" name="TextBox 9"/>
-          <p:cNvSpPr txBox="1"/>
-          <p:nvPr/>
-        </p:nvSpPr>
-        <p:spPr>
-          <a:xfrm>
-            <a:off x="457200" y="3703320"/>
             <a:ext cx="4114800" cy="1005840"/>
           </a:xfrm>
           <a:prstGeom prst="rect">
@@ -25173,9 +25199,88 @@
           </a:p>
         </p:txBody>
       </p:sp>
+      <p:sp>
+        <p:nvSpPr>
+          <p:cNvPr id="11" name="Rectangle 10"/>
+          <p:cNvSpPr/>
+          <p:nvPr/>
+        </p:nvSpPr>
+        <p:spPr>
+          <a:xfrm>
+            <a:off x="457200" y="4434840"/>
+            <a:ext cx="4114800" cy="320040"/>
+          </a:xfrm>
+          <a:prstGeom prst="rect">
+            <a:avLst/>
+          </a:prstGeom>
+          <a:solidFill>
+            <a:srgbClr val="F4A341"/>
+          </a:solidFill>
+          <a:ln>
+            <a:noFill/>
+          </a:ln>
+          <a:effectLst/>
+        </p:spPr>
+        <p:style>
+          <a:lnRef idx="1">
+            <a:schemeClr val="accent1"/>
+          </a:lnRef>
+          <a:fillRef idx="3">
+            <a:schemeClr val="accent1"/>
+          </a:fillRef>
+          <a:effectRef idx="2">
+            <a:schemeClr val="accent1"/>
+          </a:effectRef>
+          <a:fontRef idx="minor">
+            <a:schemeClr val="lt1"/>
+          </a:fontRef>
+        </p:style>
+        <p:txBody>
+          <a:bodyPr rtlCol="0" anchor="ctr"/>
+          <a:lstStyle/>
+          <a:p>
+            <a:pPr algn="ctr"/>
+          </a:p>
+        </p:txBody>
+      </p:sp>
+      <p:sp>
+        <p:nvSpPr>
+          <p:cNvPr id="12" name="TextBox 11"/>
+          <p:cNvSpPr txBox="1"/>
+          <p:nvPr/>
+        </p:nvSpPr>
+        <p:spPr>
+          <a:xfrm>
+            <a:off x="457200" y="4434840"/>
+            <a:ext cx="4114800" cy="320040"/>
+          </a:xfrm>
+          <a:prstGeom prst="rect">
+            <a:avLst/>
+          </a:prstGeom>
+          <a:noFill/>
+        </p:spPr>
+        <p:txBody>
+          <a:bodyPr wrap="square" lIns="18288" rIns="18288" tIns="9144" bIns="9144" anchor="ctr">
+            <a:spAutoFit/>
+          </a:bodyPr>
+          <a:lstStyle/>
+          <a:p>
+            <a:pPr algn="ctr"/>
+            <a:r>
+              <a:rPr sz="1100" b="1" i="0">
+                <a:solidFill>
+                  <a:srgbClr val="21295C"/>
+                </a:solidFill>
+                <a:latin typeface="Calibri"/>
+              </a:rPr>
+              <a:t>k = 7 já preserva 100 % da consistência do baseline.</a:t>
+            </a:r>
+          </a:p>
+        </p:txBody>
+      </p:sp>
       <p:pic>
         <p:nvPicPr>
-          <p:cNvPr id="11" name="Picture 10" descr="mcts_k_children.png"/>
+          <p:cNvPr id="13" name="Picture 12" descr="mcts_k_children.png"/>
           <p:cNvPicPr>
             <a:picLocks noChangeAspect="1"/>
           </p:cNvPicPr>
@@ -25189,8 +25294,8 @@
         </p:blipFill>
         <p:spPr>
           <a:xfrm>
-            <a:off x="4846320" y="1188720"/>
-            <a:ext cx="3840480" cy="1323859"/>
+            <a:off x="4754880" y="1188720"/>
+            <a:ext cx="3931920" cy="1355379"/>
           </a:xfrm>
           <a:prstGeom prst="rect">
             <a:avLst/>
@@ -25199,7 +25304,140 @@
       </p:pic>
       <p:sp>
         <p:nvSpPr>
-          <p:cNvPr id="12" name="TextBox 11"/>
+          <p:cNvPr id="14" name="TextBox 13"/>
+          <p:cNvSpPr txBox="1"/>
+          <p:nvPr/>
+        </p:nvSpPr>
+        <p:spPr>
+          <a:xfrm>
+            <a:off x="4754880" y="2743200"/>
+            <a:ext cx="3931920" cy="320040"/>
+          </a:xfrm>
+          <a:prstGeom prst="rect">
+            <a:avLst/>
+          </a:prstGeom>
+          <a:noFill/>
+        </p:spPr>
+        <p:txBody>
+          <a:bodyPr wrap="square" lIns="18288" rIns="18288" tIns="9144" bIns="9144" anchor="t">
+            <a:spAutoFit/>
+          </a:bodyPr>
+          <a:lstStyle/>
+          <a:p>
+            <a:pPr algn="l"/>
+            <a:r>
+              <a:rPr sz="1400" b="1" i="0">
+                <a:solidFill>
+                  <a:srgbClr val="065A82"/>
+                </a:solidFill>
+                <a:latin typeface="Calibri"/>
+              </a:rPr>
+              <a:t>Resultados observados</a:t>
+            </a:r>
+          </a:p>
+        </p:txBody>
+      </p:sp>
+      <p:sp>
+        <p:nvSpPr>
+          <p:cNvPr id="15" name="TextBox 14"/>
+          <p:cNvSpPr txBox="1"/>
+          <p:nvPr/>
+        </p:nvSpPr>
+        <p:spPr>
+          <a:xfrm>
+            <a:off x="4754880" y="3108960"/>
+            <a:ext cx="3931920" cy="1280160"/>
+          </a:xfrm>
+          <a:prstGeom prst="rect">
+            <a:avLst/>
+          </a:prstGeom>
+          <a:noFill/>
+        </p:spPr>
+        <p:txBody>
+          <a:bodyPr wrap="square" lIns="18288" tIns="0">
+            <a:spAutoFit/>
+          </a:bodyPr>
+          <a:lstStyle/>
+          <a:p>
+            <a:pPr algn="l">
+              <a:spcAft>
+                <a:spcPts val="300"/>
+              </a:spcAft>
+            </a:pPr>
+            <a:r>
+              <a:rPr sz="1100" b="1">
+                <a:solidFill>
+                  <a:srgbClr val="1C7293"/>
+                </a:solidFill>
+                <a:latin typeface="Calibri"/>
+              </a:rPr>
+              <a:t>•  </a:t>
+            </a:r>
+            <a:r>
+              <a:rPr sz="1100">
+                <a:solidFill>
+                  <a:srgbClr val="334455"/>
+                </a:solidFill>
+                <a:latin typeface="Calibri"/>
+              </a:rPr>
+              <a:t>Consistência estável em k ∈ {3, 5, 7, 10, 14}.</a:t>
+            </a:r>
+          </a:p>
+          <a:p>
+            <a:pPr algn="l">
+              <a:spcAft>
+                <a:spcPts val="300"/>
+              </a:spcAft>
+            </a:pPr>
+            <a:r>
+              <a:rPr sz="1100" b="1">
+                <a:solidFill>
+                  <a:srgbClr val="1C7293"/>
+                </a:solidFill>
+                <a:latin typeface="Calibri"/>
+              </a:rPr>
+              <a:t>•  </a:t>
+            </a:r>
+            <a:r>
+              <a:rPr sz="1100">
+                <a:solidFill>
+                  <a:srgbClr val="334455"/>
+                </a:solidFill>
+                <a:latin typeface="Calibri"/>
+              </a:rPr>
+              <a:t>Concordância com k=14 (standard) próxima de 33 %.</a:t>
+            </a:r>
+          </a:p>
+          <a:p>
+            <a:pPr algn="l">
+              <a:spcAft>
+                <a:spcPts val="300"/>
+              </a:spcAft>
+            </a:pPr>
+            <a:r>
+              <a:rPr sz="1100" b="1">
+                <a:solidFill>
+                  <a:srgbClr val="1C7293"/>
+                </a:solidFill>
+                <a:latin typeface="Calibri"/>
+              </a:rPr>
+              <a:t>•  </a:t>
+            </a:r>
+            <a:r>
+              <a:rPr sz="1100">
+                <a:solidFill>
+                  <a:srgbClr val="334455"/>
+                </a:solidFill>
+                <a:latin typeface="Calibri"/>
+              </a:rPr>
+              <a:t>Custo computacional cresce linearmente com k.</a:t>
+            </a:r>
+          </a:p>
+        </p:txBody>
+      </p:sp>
+      <p:sp>
+        <p:nvSpPr>
+          <p:cNvPr id="16" name="TextBox 15"/>
           <p:cNvSpPr txBox="1"/>
           <p:nvPr/>
         </p:nvSpPr>
@@ -25234,7 +25472,7 @@
       </p:sp>
       <p:sp>
         <p:nvSpPr>
-          <p:cNvPr id="13" name="TextBox 12"/>
+          <p:cNvPr id="17" name="TextBox 16"/>
           <p:cNvSpPr txBox="1"/>
           <p:nvPr/>
         </p:nvSpPr>

--- a/docs/presentation.pptx
+++ b/docs/presentation.pptx
@@ -4790,7 +4790,7 @@
         <p:spPr>
           <a:xfrm>
             <a:off x="6172200" y="1554480"/>
-            <a:ext cx="466760" cy="292608"/>
+            <a:ext cx="1067366" cy="292608"/>
           </a:xfrm>
           <a:prstGeom prst="rect">
             <a:avLst/>
@@ -4833,8 +4833,8 @@
         </p:nvSpPr>
         <p:spPr>
           <a:xfrm>
-            <a:off x="6684680" y="1554480"/>
-            <a:ext cx="777240" cy="292608"/>
+            <a:off x="7285286" y="1554480"/>
+            <a:ext cx="868680" cy="292608"/>
           </a:xfrm>
           <a:prstGeom prst="rect">
             <a:avLst/>
@@ -4855,7 +4855,7 @@
                 </a:solidFill>
                 <a:latin typeface="Calibri"/>
               </a:rPr>
-              <a:t>9 iter/s</a:t>
+              <a:t>9 k iter/s</a:t>
             </a:r>
           </a:p>
         </p:txBody>
@@ -4904,7 +4904,7 @@
         <p:spPr>
           <a:xfrm>
             <a:off x="6172200" y="1956816"/>
-            <a:ext cx="797025" cy="292608"/>
+            <a:ext cx="1268377" cy="292608"/>
           </a:xfrm>
           <a:prstGeom prst="rect">
             <a:avLst/>
@@ -4947,8 +4947,8 @@
         </p:nvSpPr>
         <p:spPr>
           <a:xfrm>
-            <a:off x="7014945" y="1956816"/>
-            <a:ext cx="777240" cy="292608"/>
+            <a:off x="7486297" y="1956816"/>
+            <a:ext cx="868680" cy="292608"/>
           </a:xfrm>
           <a:prstGeom prst="rect">
             <a:avLst/>
@@ -4969,7 +4969,7 @@
                 </a:solidFill>
                 <a:latin typeface="Calibri"/>
               </a:rPr>
-              <a:t>50 iter/s</a:t>
+              <a:t>50 k iter/s</a:t>
             </a:r>
           </a:p>
         </p:txBody>
@@ -5018,7 +5018,7 @@
         <p:spPr>
           <a:xfrm>
             <a:off x="6172200" y="2359152"/>
-            <a:ext cx="1052671" cy="292608"/>
+            <a:ext cx="1417883" cy="292608"/>
           </a:xfrm>
           <a:prstGeom prst="rect">
             <a:avLst/>
@@ -5061,8 +5061,8 @@
         </p:nvSpPr>
         <p:spPr>
           <a:xfrm>
-            <a:off x="7270591" y="2359152"/>
-            <a:ext cx="777240" cy="292608"/>
+            <a:off x="7635803" y="2359152"/>
+            <a:ext cx="868680" cy="292608"/>
           </a:xfrm>
           <a:prstGeom prst="rect">
             <a:avLst/>
@@ -5083,7 +5083,7 @@
                 </a:solidFill>
                 <a:latin typeface="Calibri"/>
               </a:rPr>
-              <a:t>179 iter/s</a:t>
+              <a:t>179 k iter/s</a:t>
             </a:r>
           </a:p>
         </p:txBody>
@@ -5132,7 +5132,7 @@
         <p:spPr>
           <a:xfrm>
             <a:off x="6172200" y="2761488"/>
-            <a:ext cx="1039888" cy="292608"/>
+            <a:ext cx="1410448" cy="292608"/>
           </a:xfrm>
           <a:prstGeom prst="rect">
             <a:avLst/>
@@ -5175,8 +5175,8 @@
         </p:nvSpPr>
         <p:spPr>
           <a:xfrm>
-            <a:off x="7257808" y="2761488"/>
-            <a:ext cx="777240" cy="292608"/>
+            <a:off x="7628368" y="2761488"/>
+            <a:ext cx="868680" cy="292608"/>
           </a:xfrm>
           <a:prstGeom prst="rect">
             <a:avLst/>
@@ -5197,7 +5197,7 @@
                 </a:solidFill>
                 <a:latin typeface="Calibri"/>
               </a:rPr>
-              <a:t>168 iter/s</a:t>
+              <a:t>168 k iter/s</a:t>
             </a:r>
           </a:p>
         </p:txBody>
@@ -5290,7 +5290,7 @@
         <p:spPr>
           <a:xfrm>
             <a:off x="8138160" y="3163824"/>
-            <a:ext cx="777240" cy="292608"/>
+            <a:ext cx="868680" cy="292608"/>
           </a:xfrm>
           <a:prstGeom prst="rect">
             <a:avLst/>
@@ -5311,7 +5311,7 @@
                 </a:solidFill>
                 <a:latin typeface="Calibri"/>
               </a:rPr>
-              <a:t>13k iter/s</a:t>
+              <a:t>13 M iter/s</a:t>
             </a:r>
           </a:p>
         </p:txBody>

--- a/docs/presentation.pptx
+++ b/docs/presentation.pptx
@@ -3959,7 +3959,7 @@
                 </a:solidFill>
                 <a:latin typeface="Calibri"/>
               </a:rPr>
-              <a:t>Duas optimizações ortogonais — ~1400× speedup combinado</a:t>
+              <a:t>Duas optimizações ortogonais — ~44× speedup do kernel + reuse entre turnos</a:t>
             </a:r>
           </a:p>
         </p:txBody>
@@ -4790,7 +4790,7 @@
         <p:spPr>
           <a:xfrm>
             <a:off x="6172200" y="1554480"/>
-            <a:ext cx="1067366" cy="292608"/>
+            <a:ext cx="1329560" cy="292608"/>
           </a:xfrm>
           <a:prstGeom prst="rect">
             <a:avLst/>
@@ -4833,7 +4833,7 @@
         </p:nvSpPr>
         <p:spPr>
           <a:xfrm>
-            <a:off x="7285286" y="1554480"/>
+            <a:off x="7547480" y="1554480"/>
             <a:ext cx="868680" cy="292608"/>
           </a:xfrm>
           <a:prstGeom prst="rect">
@@ -4855,7 +4855,7 @@
                 </a:solidFill>
                 <a:latin typeface="Calibri"/>
               </a:rPr>
-              <a:t>9 k iter/s</a:t>
+              <a:t>5 k iter/s</a:t>
             </a:r>
           </a:p>
         </p:txBody>
@@ -4904,7 +4904,7 @@
         <p:spPr>
           <a:xfrm>
             <a:off x="6172200" y="1956816"/>
-            <a:ext cx="1268377" cy="292608"/>
+            <a:ext cx="1609227" cy="292608"/>
           </a:xfrm>
           <a:prstGeom prst="rect">
             <a:avLst/>
@@ -4947,7 +4947,7 @@
         </p:nvSpPr>
         <p:spPr>
           <a:xfrm>
-            <a:off x="7486297" y="1956816"/>
+            <a:off x="7827147" y="1956816"/>
             <a:ext cx="868680" cy="292608"/>
           </a:xfrm>
           <a:prstGeom prst="rect">
@@ -4969,7 +4969,7 @@
                 </a:solidFill>
                 <a:latin typeface="Calibri"/>
               </a:rPr>
-              <a:t>50 k iter/s</a:t>
+              <a:t>30 k iter/s</a:t>
             </a:r>
           </a:p>
         </p:txBody>
@@ -5018,7 +5018,7 @@
         <p:spPr>
           <a:xfrm>
             <a:off x="6172200" y="2359152"/>
-            <a:ext cx="1417883" cy="292608"/>
+            <a:ext cx="1920240" cy="292608"/>
           </a:xfrm>
           <a:prstGeom prst="rect">
             <a:avLst/>
@@ -5061,7 +5061,7 @@
         </p:nvSpPr>
         <p:spPr>
           <a:xfrm>
-            <a:off x="7635803" y="2359152"/>
+            <a:off x="8138160" y="2359152"/>
             <a:ext cx="868680" cy="292608"/>
           </a:xfrm>
           <a:prstGeom prst="rect">
@@ -5083,7 +5083,7 @@
                 </a:solidFill>
                 <a:latin typeface="Calibri"/>
               </a:rPr>
-              <a:t>179 k iter/s</a:t>
+              <a:t>220 k iter/s</a:t>
             </a:r>
           </a:p>
         </p:txBody>
@@ -5132,7 +5132,7 @@
         <p:spPr>
           <a:xfrm>
             <a:off x="6172200" y="2761488"/>
-            <a:ext cx="1410448" cy="292608"/>
+            <a:ext cx="1920240" cy="292608"/>
           </a:xfrm>
           <a:prstGeom prst="rect">
             <a:avLst/>
@@ -5175,7 +5175,7 @@
         </p:nvSpPr>
         <p:spPr>
           <a:xfrm>
-            <a:off x="7628368" y="2761488"/>
+            <a:off x="8138160" y="2761488"/>
             <a:ext cx="868680" cy="292608"/>
           </a:xfrm>
           <a:prstGeom prst="rect">
@@ -5197,7 +5197,7 @@
                 </a:solidFill>
                 <a:latin typeface="Calibri"/>
               </a:rPr>
-              <a:t>168 k iter/s</a:t>
+              <a:t>220 k iter/s</a:t>
             </a:r>
           </a:p>
         </p:txBody>
@@ -5232,7 +5232,7 @@
                 </a:solidFill>
                 <a:latin typeface="Calibri"/>
               </a:rPr>
-              <a:t>ReuseFlat (peak)</a:t>
+              <a:t>ReuseFlat Solver</a:t>
             </a:r>
           </a:p>
         </p:txBody>
@@ -5311,7 +5311,7 @@
                 </a:solidFill>
                 <a:latin typeface="Calibri"/>
               </a:rPr>
-              <a:t>13 M iter/s</a:t>
+              <a:t>220 k iter/s</a:t>
             </a:r>
           </a:p>
         </p:txBody>
@@ -5425,7 +5425,7 @@
                 </a:solidFill>
                 <a:latin typeface="Cambria"/>
               </a:rPr>
-              <a:t>≈ 1400× speedup  vs  Python puro</a:t>
+              <a:t>≈ 44× speedup  vs  Python puro</a:t>
             </a:r>
           </a:p>
         </p:txBody>
@@ -11758,7 +11758,7 @@
                 </a:solidFill>
                 <a:latin typeface="Cambria"/>
               </a:rPr>
-              <a:t>13 M</a:t>
+              <a:t>220 k</a:t>
             </a:r>
           </a:p>
         </p:txBody>
@@ -13479,7 +13479,7 @@
                 </a:solidFill>
                 <a:latin typeface="Calibri"/>
               </a:rPr>
-              <a:t>→  Kernels Numba JIT em arrays planos  →  ~1400× speedup.</a:t>
+              <a:t>→  Kernels Numba JIT em arrays planos  →  ~44× speedup.</a:t>
             </a:r>
           </a:p>
         </p:txBody>
@@ -14548,7 +14548,7 @@
                 </a:solidFill>
                 <a:latin typeface="Calibri"/>
               </a:rPr>
-              <a:t>Numba: ~13 M iter/s  ·  1400×</a:t>
+              <a:t>Numba: ~220 k iter/s  ·  ~44×</a:t>
             </a:r>
           </a:p>
         </p:txBody>
@@ -24639,7 +24639,7 @@
                 </a:solidFill>
                 <a:latin typeface="Calibri"/>
               </a:rPr>
-              <a:t>Kernels @njit  ·  ~13M iter/s</a:t>
+              <a:t>Kernels @njit  ·  ~220 k iter/s</a:t>
             </a:r>
           </a:p>
         </p:txBody>
